--- a/media/resources/files/EkiOrunduuOnduktar_Boluu_UnaaJaryw.pptx
+++ b/media/resources/files/EkiOrunduuOnduktar_Boluu_UnaaJaryw.pptx
@@ -11665,7 +11665,7 @@
                 <a:latin typeface="Impact" panose="020B0806030902050204" pitchFamily="34" charset="0"/>
                 <a:ea typeface="굴림" panose="020B0600000101010101" pitchFamily="34" charset="-127"/>
               </a:rPr>
-              <a:t>START</a:t>
+              <a:t>Башта</a:t>
             </a:r>
             <a:endParaRPr lang="en-US" altLang="en-US" sz="8862" dirty="0">
               <a:solidFill>
@@ -12839,7 +12839,7 @@
                 </a:solidFill>
                 <a:latin typeface="Calibri" panose="020F0502020204030204"/>
               </a:rPr>
-              <a:t>Турдуу пикирлер учун ыраазычылык билдиребиз.</a:t>
+              <a:t>Түрдүү пикирлер үчүн ыраазычылык билдиребиз.</a:t>
             </a:r>
           </a:p>
           <a:p>

--- a/media/resources/files/EkiOrunduuOnduktar_Boluu_UnaaJaryw.pptx
+++ b/media/resources/files/EkiOrunduuOnduktar_Boluu_UnaaJaryw.pptx
@@ -4393,7 +4393,7 @@
                 <a:ea typeface="+mn-ea"/>
                 <a:cs typeface="+mn-cs"/>
               </a:rPr>
-              <a:t>Суроону тандоо үчүн ак кутучаны басыңыз/тийиңиз. Тиешелүү суроого өтүү үчүн номерди басыңыз.</a:t>
+              <a:t>Суроону тандоо үчүн ак кутучаны басыңыз. Ошол суроого өтүү үчүн номерди басыңыз.</a:t>
             </a:r>
           </a:p>
           <a:p>
@@ -4465,7 +4465,7 @@
                 <a:ea typeface="+mn-ea"/>
                 <a:cs typeface="+mn-cs"/>
               </a:rPr>
-              <a:t>Команданын унаасын чыкылдатып, аны бир орун алдыга жылдырыңыз. Жеңүүчү анимация бар</a:t>
+              <a:t>Команданын унаасын басып, бир орун алдыга жылдырыңыз. Жеңгенде анимация чыгат.</a:t>
             </a:r>
           </a:p>
           <a:p>
@@ -5432,7 +5432,7 @@
             <a:pPr algn="ctr"/>
             <a:r>
               <a:rPr lang="en-GB" sz="9600" dirty="0"/>
-              <a:t>63.6 ÷ 1.2</a:t>
+              <a:t>63,6 ÷ 1,2</a:t>
             </a:r>
           </a:p>
         </p:txBody>
@@ -6029,7 +6029,7 @@
             <a:pPr algn="ctr"/>
             <a:r>
               <a:rPr lang="en-GB" sz="9600" dirty="0"/>
-              <a:t>3.3 ÷ 0.15</a:t>
+              <a:t>3,3 ÷ 0,15</a:t>
             </a:r>
           </a:p>
         </p:txBody>
@@ -6626,7 +6626,7 @@
             <a:pPr algn="ctr"/>
             <a:r>
               <a:rPr lang="en-GB" sz="9600" dirty="0"/>
-              <a:t>83.7 ÷ 2.7</a:t>
+              <a:t>83,7 ÷ 2,7</a:t>
             </a:r>
           </a:p>
         </p:txBody>
@@ -7223,7 +7223,7 @@
             <a:pPr algn="ctr"/>
             <a:r>
               <a:rPr lang="en-GB" sz="9600" dirty="0"/>
-              <a:t>9 ÷ 0.25</a:t>
+              <a:t>9 ÷ 0,25</a:t>
             </a:r>
           </a:p>
         </p:txBody>
@@ -7820,7 +7820,7 @@
             <a:pPr algn="ctr"/>
             <a:r>
               <a:rPr lang="en-GB" sz="9600" dirty="0"/>
-              <a:t>44.8 ÷ 1.6</a:t>
+              <a:t>44,8 ÷ 1,6</a:t>
             </a:r>
           </a:p>
         </p:txBody>
@@ -8417,7 +8417,7 @@
             <a:pPr algn="ctr"/>
             <a:r>
               <a:rPr lang="en-GB" sz="9600" dirty="0"/>
-              <a:t>4.4 ÷ 0.08</a:t>
+              <a:t>4,4 ÷ 0,08</a:t>
             </a:r>
           </a:p>
         </p:txBody>
@@ -9014,7 +9014,7 @@
             <a:pPr algn="ctr"/>
             <a:r>
               <a:rPr lang="en-GB" sz="9600" dirty="0"/>
-              <a:t>2.61 ÷ 0.03</a:t>
+              <a:t>2,61 ÷ 0,03</a:t>
             </a:r>
           </a:p>
         </p:txBody>
@@ -9611,7 +9611,7 @@
             <a:pPr algn="ctr"/>
             <a:r>
               <a:rPr lang="en-GB" sz="9600" dirty="0"/>
-              <a:t>7 ÷ 0.35</a:t>
+              <a:t>7 ÷ 0,35</a:t>
             </a:r>
           </a:p>
         </p:txBody>
@@ -10208,7 +10208,7 @@
             <a:pPr algn="ctr"/>
             <a:r>
               <a:rPr lang="en-GB" sz="9600" dirty="0"/>
-              <a:t>13.2 ÷ 1.1</a:t>
+              <a:t>13,2 ÷ 1,1</a:t>
             </a:r>
           </a:p>
         </p:txBody>
@@ -10805,7 +10805,7 @@
             <a:pPr algn="ctr"/>
             <a:r>
               <a:rPr lang="en-GB" sz="9600" dirty="0"/>
-              <a:t>7.14 ÷ 0.17</a:t>
+              <a:t>7,14 ÷ 0,17</a:t>
             </a:r>
           </a:p>
         </p:txBody>
@@ -12544,7 +12544,7 @@
             <a:pPr algn="ctr"/>
             <a:r>
               <a:rPr lang="en-GB" sz="9600" dirty="0"/>
-              <a:t>4.42 ÷ 0.17</a:t>
+              <a:t>4,42 ÷ 0,17</a:t>
             </a:r>
           </a:p>
         </p:txBody>
@@ -22312,7 +22312,7 @@
             <a:pPr algn="ctr"/>
             <a:r>
               <a:rPr lang="en-GB" sz="9600" dirty="0"/>
-              <a:t>6 ÷ 0.15</a:t>
+              <a:t>6 ÷ 0,15</a:t>
             </a:r>
           </a:p>
         </p:txBody>
@@ -22909,7 +22909,7 @@
             <a:pPr algn="ctr"/>
             <a:r>
               <a:rPr lang="en-GB" sz="9600" dirty="0"/>
-              <a:t>5.4 ÷ 0.12</a:t>
+              <a:t>5,4 ÷ 0,12</a:t>
             </a:r>
           </a:p>
         </p:txBody>
@@ -23506,7 +23506,7 @@
             <a:pPr algn="ctr"/>
             <a:r>
               <a:rPr lang="en-GB" sz="9600" dirty="0"/>
-              <a:t>5.81 ÷ 0.07</a:t>
+              <a:t>5,81 ÷ 0,07</a:t>
             </a:r>
           </a:p>
         </p:txBody>
@@ -24103,7 +24103,7 @@
             <a:pPr algn="ctr"/>
             <a:r>
               <a:rPr lang="en-GB" sz="9600" dirty="0"/>
-              <a:t>9.02 ÷ 0.41</a:t>
+              <a:t>9,02 ÷ 0,41</a:t>
             </a:r>
           </a:p>
         </p:txBody>
@@ -24700,7 +24700,7 @@
             <a:pPr algn="ctr"/>
             <a:r>
               <a:rPr lang="en-GB" sz="9600" dirty="0"/>
-              <a:t>6 ÷ 0.12</a:t>
+              <a:t>6 ÷ 0,12</a:t>
             </a:r>
           </a:p>
         </p:txBody>
